--- a/apisiz/raporlar/2026-10-18-rakip-taramasi/sunum/2-urun-karsilastirma.pptx
+++ b/apisiz/raporlar/2026-10-18-rakip-taramasi/sunum/2-urun-karsilastirma.pptx
@@ -3212,7 +3212,7 @@
                   <a:srgbClr val="8A6514"/>
                 </a:solidFill>
               </a:rPr>
-              <a:t>B O L B É</a:t>
+              <a:t>M O T İ F</a:t>
             </a:r>
           </a:p>
         </p:txBody>
@@ -3405,7 +3405,7 @@
                   <a:srgbClr val="5F5C6D"/>
                 </a:solidFill>
               </a:rPr>
-              <a:t>BOLBÉ · 2 · Ürün Karşılaştırma Analisti · Haftalık Rakip Taraması</a:t>
+              <a:t>MOTİF · 2 · Ürün Karşılaştırma Analisti · Haftalık Rakip Taraması</a:t>
             </a:r>
           </a:p>
         </p:txBody>
@@ -3720,7 +3720,7 @@
                   <a:srgbClr val="5F5C6D"/>
                 </a:solidFill>
               </a:rPr>
-              <a:t>BOLBÉ · 2 · Ürün Karşılaştırma Analisti · Haftalık Rakip Taraması</a:t>
+              <a:t>MOTİF · 2 · Ürün Karşılaştırma Analisti · Haftalık Rakip Taraması</a:t>
             </a:r>
           </a:p>
         </p:txBody>
@@ -3945,7 +3945,7 @@
                   <a:srgbClr val="5F5C6D"/>
                 </a:solidFill>
               </a:rPr>
-              <a:t>BOLBÉ · 2 · Ürün Karşılaştırma Analisti · Haftalık Rakip Taraması</a:t>
+              <a:t>MOTİF · 2 · Ürün Karşılaştırma Analisti · Haftalık Rakip Taraması</a:t>
             </a:r>
           </a:p>
         </p:txBody>
@@ -4170,7 +4170,7 @@
                   <a:srgbClr val="5F5C6D"/>
                 </a:solidFill>
               </a:rPr>
-              <a:t>BOLBÉ · 2 · Ürün Karşılaştırma Analisti · Haftalık Rakip Taraması</a:t>
+              <a:t>MOTİF · 2 · Ürün Karşılaştırma Analisti · Haftalık Rakip Taraması</a:t>
             </a:r>
           </a:p>
         </p:txBody>
@@ -5774,7 +5774,7 @@
                   <a:srgbClr val="5F5C6D"/>
                 </a:solidFill>
               </a:rPr>
-              <a:t>BOLBÉ · 2 · Ürün Karşılaştırma Analisti · Haftalık Rakip Taraması</a:t>
+              <a:t>MOTİF · 2 · Ürün Karşılaştırma Analisti · Haftalık Rakip Taraması</a:t>
             </a:r>
           </a:p>
         </p:txBody>
@@ -6517,7 +6517,7 @@
                   <a:srgbClr val="5F5C6D"/>
                 </a:solidFill>
               </a:rPr>
-              <a:t>BOLBÉ · 2 · Ürün Karşılaştırma Analisti · Haftalık Rakip Taraması</a:t>
+              <a:t>MOTİF · 2 · Ürün Karşılaştırma Analisti · Haftalık Rakip Taraması</a:t>
             </a:r>
           </a:p>
         </p:txBody>
@@ -6822,7 +6822,7 @@
                   <a:srgbClr val="5F5C6D"/>
                 </a:solidFill>
               </a:rPr>
-              <a:t>BOLBÉ · 2 · Ürün Karşılaştırma Analisti · Haftalık Rakip Taraması</a:t>
+              <a:t>MOTİF · 2 · Ürün Karşılaştırma Analisti · Haftalık Rakip Taraması</a:t>
             </a:r>
           </a:p>
         </p:txBody>
@@ -7047,7 +7047,7 @@
                   <a:srgbClr val="5F5C6D"/>
                 </a:solidFill>
               </a:rPr>
-              <a:t>BOLBÉ · 2 · Ürün Karşılaştırma Analisti · Haftalık Rakip Taraması</a:t>
+              <a:t>MOTİF · 2 · Ürün Karşılaştırma Analisti · Haftalık Rakip Taraması</a:t>
             </a:r>
           </a:p>
         </p:txBody>
@@ -7352,7 +7352,7 @@
                   <a:srgbClr val="5F5C6D"/>
                 </a:solidFill>
               </a:rPr>
-              <a:t>BOLBÉ · 2 · Ürün Karşılaştırma Analisti · Haftalık Rakip Taraması</a:t>
+              <a:t>MOTİF · 2 · Ürün Karşılaştırma Analisti · Haftalık Rakip Taraması</a:t>
             </a:r>
           </a:p>
         </p:txBody>
@@ -7532,7 +7532,7 @@
                   <a:srgbClr val="5F5C6D"/>
                 </a:solidFill>
               </a:rPr>
-              <a:t>BOLBÉ · 2 · Ürün Karşılaştırma Analisti · Haftalık Rakip Taraması</a:t>
+              <a:t>MOTİF · 2 · Ürün Karşılaştırma Analisti · Haftalık Rakip Taraması</a:t>
             </a:r>
           </a:p>
         </p:txBody>
